--- a/03_Shared/05_Workshop_Presentations/ECS_CSDM_Workshop_Modernizing_the_Core.pptx
+++ b/03_Shared/05_Workshop_Presentations/ECS_CSDM_Workshop_Modernizing_the_Core.pptx
@@ -12952,6 +12952,10 @@
             <a:prstDash val="solid"/>
           </a:ln>
         </p:spPr>
+        <p:txBody>
+          <a:bodyPr/>
+          <a:p/>
+        </p:txBody>
       </p:sp>
       <p:sp>
         <p:nvSpPr>
@@ -13122,6 +13126,10 @@
             <a:prstDash val="solid"/>
           </a:ln>
         </p:spPr>
+        <p:txBody>
+          <a:bodyPr/>
+          <a:p/>
+        </p:txBody>
       </p:sp>
       <p:sp>
         <p:nvSpPr>
@@ -13147,6 +13155,10 @@
             <a:prstDash val="solid"/>
           </a:ln>
         </p:spPr>
+        <p:txBody>
+          <a:bodyPr/>
+          <a:p/>
+        </p:txBody>
       </p:sp>
       <p:sp>
         <p:nvSpPr>
@@ -13208,6 +13220,10 @@
             <a:prstDash val="solid"/>
           </a:ln>
         </p:spPr>
+        <p:txBody>
+          <a:bodyPr/>
+          <a:p/>
+        </p:txBody>
       </p:sp>
       <p:sp>
         <p:nvSpPr>
@@ -13230,140 +13246,204 @@
           <a:bodyPr wrap="square" rtlCol="0" anchor="t"/>
           <a:lstStyle/>
           <a:p>
-            <a:pPr indent="0" marL="0">
-              <a:buNone/>
-            </a:pPr>
-            <a:r>
-              <a:rPr lang="en-US" sz="1100" dirty="0">
-                <a:solidFill>
-                  <a:srgbClr val="334155"/>
-                </a:solidFill>
-                <a:latin typeface="Calibri" pitchFamily="34" charset="0"/>
-                <a:ea typeface="Calibri" pitchFamily="34" charset="-122"/>
-                <a:cs typeface="Calibri" pitchFamily="34" charset="-120"/>
-              </a:rPr>
-              <a:t>✓  Activating and configuring OOTB features</a:t>
-            </a:r>
-            <a:endParaRPr lang="en-US" sz="1100" dirty="0"/>
-          </a:p>
-          <a:p>
-            <a:pPr indent="0" marL="0">
-              <a:buNone/>
-            </a:pPr>
-            <a:r>
-              <a:rPr lang="en-US" sz="1100" dirty="0">
-                <a:solidFill>
-                  <a:srgbClr val="334155"/>
-                </a:solidFill>
-                <a:latin typeface="Calibri" pitchFamily="34" charset="0"/>
-                <a:ea typeface="Calibri" pitchFamily="34" charset="-122"/>
-                <a:cs typeface="Calibri" pitchFamily="34" charset="-120"/>
-              </a:rPr>
-              <a:t>✓  Setting up categories and taxonomies</a:t>
-            </a:r>
-            <a:endParaRPr lang="en-US" sz="1100" dirty="0"/>
-          </a:p>
-          <a:p>
-            <a:pPr indent="0" marL="0">
-              <a:buNone/>
-            </a:pPr>
-            <a:r>
-              <a:rPr lang="en-US" sz="1100" dirty="0">
-                <a:solidFill>
-                  <a:srgbClr val="334155"/>
-                </a:solidFill>
-                <a:latin typeface="Calibri" pitchFamily="34" charset="0"/>
-                <a:ea typeface="Calibri" pitchFamily="34" charset="-122"/>
-                <a:cs typeface="Calibri" pitchFamily="34" charset="-120"/>
-              </a:rPr>
-              <a:t>✓  Building assignment rules and routing logic</a:t>
-            </a:r>
-            <a:endParaRPr lang="en-US" sz="1100" dirty="0"/>
-          </a:p>
-          <a:p>
-            <a:pPr indent="0" marL="0">
-              <a:buNone/>
-            </a:pPr>
-            <a:r>
-              <a:rPr lang="en-US" sz="1100" dirty="0">
-                <a:solidFill>
-                  <a:srgbClr val="334155"/>
-                </a:solidFill>
-                <a:latin typeface="Calibri" pitchFamily="34" charset="0"/>
-                <a:ea typeface="Calibri" pitchFamily="34" charset="-122"/>
-                <a:cs typeface="Calibri" pitchFamily="34" charset="-120"/>
-              </a:rPr>
-              <a:t>✓  Defining SLA targets and schedules</a:t>
-            </a:r>
-            <a:endParaRPr lang="en-US" sz="1100" dirty="0"/>
-          </a:p>
-          <a:p>
-            <a:pPr indent="0" marL="0">
-              <a:buNone/>
-            </a:pPr>
-            <a:r>
-              <a:rPr lang="en-US" sz="1100" dirty="0">
-                <a:solidFill>
-                  <a:srgbClr val="334155"/>
-                </a:solidFill>
-                <a:latin typeface="Calibri" pitchFamily="34" charset="0"/>
-                <a:ea typeface="Calibri" pitchFamily="34" charset="-122"/>
-                <a:cs typeface="Calibri" pitchFamily="34" charset="-120"/>
-              </a:rPr>
-              <a:t>✓  Configuring notifications and email templates</a:t>
-            </a:r>
-            <a:endParaRPr lang="en-US" sz="1100" dirty="0"/>
-          </a:p>
-          <a:p>
-            <a:pPr indent="0" marL="0">
-              <a:buNone/>
-            </a:pPr>
-            <a:r>
-              <a:rPr lang="en-US" sz="1100" dirty="0">
-                <a:solidFill>
-                  <a:srgbClr val="334155"/>
-                </a:solidFill>
-                <a:latin typeface="Calibri" pitchFamily="34" charset="0"/>
-                <a:ea typeface="Calibri" pitchFamily="34" charset="-122"/>
-                <a:cs typeface="Calibri" pitchFamily="34" charset="-120"/>
-              </a:rPr>
-              <a:t>✓  Enabling AI features (PI, Now Assist, Virtual Agent)</a:t>
-            </a:r>
-            <a:endParaRPr lang="en-US" sz="1100" dirty="0"/>
-          </a:p>
-          <a:p>
-            <a:pPr indent="0" marL="0">
-              <a:buNone/>
-            </a:pPr>
-            <a:r>
-              <a:rPr lang="en-US" sz="1100" dirty="0">
-                <a:solidFill>
-                  <a:srgbClr val="334155"/>
-                </a:solidFill>
-                <a:latin typeface="Calibri" pitchFamily="34" charset="0"/>
-                <a:ea typeface="Calibri" pitchFamily="34" charset="-122"/>
-                <a:cs typeface="Calibri" pitchFamily="34" charset="-120"/>
-              </a:rPr>
-              <a:t>✓  Building reports and PA indicators</a:t>
-            </a:r>
-            <a:endParaRPr lang="en-US" sz="1100" dirty="0"/>
-          </a:p>
-          <a:p>
-            <a:pPr indent="0" marL="0">
-              <a:buNone/>
-            </a:pPr>
-            <a:r>
-              <a:rPr lang="en-US" sz="1100" dirty="0">
-                <a:solidFill>
-                  <a:srgbClr val="334155"/>
-                </a:solidFill>
-                <a:latin typeface="Calibri" pitchFamily="34" charset="0"/>
-                <a:ea typeface="Calibri" pitchFamily="34" charset="-122"/>
-                <a:cs typeface="Calibri" pitchFamily="34" charset="-120"/>
-              </a:rPr>
-              <a:t>✓  Setting system properties and thresholds</a:t>
-            </a:r>
-            <a:endParaRPr lang="en-US" sz="1100" dirty="0"/>
+            <a:r>
+              <a:rPr lang="en-US" dirty="0" sz="1100">
+                <a:solidFill>
+                  <a:srgbClr val="16A34A"/>
+                </a:solidFill>
+                <a:latin typeface="Calibri"/>
+              </a:rPr>
+              <a:t>✓  </a:t>
+            </a:r>
+            <a:r>
+              <a:rPr lang="en-US" dirty="0" sz="1100">
+                <a:solidFill>
+                  <a:srgbClr val="1A1A1A"/>
+                </a:solidFill>
+                <a:latin typeface="Calibri"/>
+              </a:rPr>
+              <a:t>Creating Business Service and Application Service records in OOTB CSDM tables</a:t>
+            </a:r>
+          </a:p>
+          <a:p>
+            <a:r>
+              <a:rPr lang="en-US" dirty="0" sz="1100">
+                <a:solidFill>
+                  <a:srgbClr val="16A34A"/>
+                </a:solidFill>
+                <a:latin typeface="Calibri"/>
+              </a:rPr>
+              <a:t>✓  </a:t>
+            </a:r>
+            <a:r>
+              <a:rPr lang="en-US" dirty="0" sz="1100">
+                <a:solidFill>
+                  <a:srgbClr val="1A1A1A"/>
+                </a:solidFill>
+                <a:latin typeface="Calibri"/>
+              </a:rPr>
+              <a:t>Defining service hierarchy (Business Application → Application Service → Technical Service)</a:t>
+            </a:r>
+          </a:p>
+          <a:p>
+            <a:r>
+              <a:rPr lang="en-US" dirty="0" sz="1100">
+                <a:solidFill>
+                  <a:srgbClr val="16A34A"/>
+                </a:solidFill>
+                <a:latin typeface="Calibri"/>
+              </a:rPr>
+              <a:t>✓  </a:t>
+            </a:r>
+            <a:r>
+              <a:rPr lang="en-US" dirty="0" sz="1100">
+                <a:solidFill>
+                  <a:srgbClr val="1A1A1A"/>
+                </a:solidFill>
+                <a:latin typeface="Calibri"/>
+              </a:rPr>
+              <a:t>Assigning service owners, service managers, and support groups via OOTB service record fields</a:t>
+            </a:r>
+          </a:p>
+          <a:p>
+            <a:r>
+              <a:rPr lang="en-US" dirty="0" sz="1100">
+                <a:solidFill>
+                  <a:srgbClr val="16A34A"/>
+                </a:solidFill>
+                <a:latin typeface="Calibri"/>
+              </a:rPr>
+              <a:t>✓  </a:t>
+            </a:r>
+            <a:r>
+              <a:rPr lang="en-US" dirty="0" sz="1100">
+                <a:solidFill>
+                  <a:srgbClr val="1A1A1A"/>
+                </a:solidFill>
+                <a:latin typeface="Calibri"/>
+              </a:rPr>
+              <a:t>Mapping CIs to Application Services via OOTB service dependency relationships</a:t>
+            </a:r>
+          </a:p>
+          <a:p>
+            <a:r>
+              <a:rPr lang="en-US" dirty="0" sz="1100">
+                <a:solidFill>
+                  <a:srgbClr val="16A34A"/>
+                </a:solidFill>
+                <a:latin typeface="Calibri"/>
+              </a:rPr>
+              <a:t>✓  </a:t>
+            </a:r>
+            <a:r>
+              <a:rPr lang="en-US" dirty="0" sz="1100">
+                <a:solidFill>
+                  <a:srgbClr val="1A1A1A"/>
+                </a:solidFill>
+                <a:latin typeface="Calibri"/>
+              </a:rPr>
+              <a:t>Configuring Service Offering and Service Commitment records (OOTB)</a:t>
+            </a:r>
+          </a:p>
+          <a:p>
+            <a:r>
+              <a:rPr lang="en-US" dirty="0" sz="1100">
+                <a:solidFill>
+                  <a:srgbClr val="16A34A"/>
+                </a:solidFill>
+                <a:latin typeface="Calibri"/>
+              </a:rPr>
+              <a:t>✓  </a:t>
+            </a:r>
+            <a:r>
+              <a:rPr lang="en-US" dirty="0" sz="1100">
+                <a:solidFill>
+                  <a:srgbClr val="1A1A1A"/>
+                </a:solidFill>
+                <a:latin typeface="Calibri"/>
+              </a:rPr>
+              <a:t>Setting service classification (customer-facing vs. supporting services)</a:t>
+            </a:r>
+          </a:p>
+          <a:p>
+            <a:r>
+              <a:rPr lang="en-US" dirty="0" sz="1100">
+                <a:solidFill>
+                  <a:srgbClr val="16A34A"/>
+                </a:solidFill>
+                <a:latin typeface="Calibri"/>
+              </a:rPr>
+              <a:t>✓  </a:t>
+            </a:r>
+            <a:r>
+              <a:rPr lang="en-US" dirty="0" sz="1100">
+                <a:solidFill>
+                  <a:srgbClr val="1A1A1A"/>
+                </a:solidFill>
+                <a:latin typeface="Calibri"/>
+              </a:rPr>
+              <a:t>Binding incidents to services via OOTB Business Service field on incident form</a:t>
+            </a:r>
+          </a:p>
+          <a:p>
+            <a:r>
+              <a:rPr lang="en-US" dirty="0" sz="1100">
+                <a:solidFill>
+                  <a:srgbClr val="16A34A"/>
+                </a:solidFill>
+                <a:latin typeface="Calibri"/>
+              </a:rPr>
+              <a:t>✓  </a:t>
+            </a:r>
+            <a:r>
+              <a:rPr lang="en-US" dirty="0" sz="1100">
+                <a:solidFill>
+                  <a:srgbClr val="1A1A1A"/>
+                </a:solidFill>
+                <a:latin typeface="Calibri"/>
+              </a:rPr>
+              <a:t>Configuring service health targets in OOTB Service Level Management</a:t>
+            </a:r>
+          </a:p>
+          <a:p>
+            <a:r>
+              <a:rPr lang="en-US" dirty="0" sz="1100">
+                <a:solidFill>
+                  <a:srgbClr val="16A34A"/>
+                </a:solidFill>
+                <a:latin typeface="Calibri"/>
+              </a:rPr>
+              <a:t>✓  </a:t>
+            </a:r>
+            <a:r>
+              <a:rPr lang="en-US" dirty="0" sz="1100">
+                <a:solidFill>
+                  <a:srgbClr val="1A1A1A"/>
+                </a:solidFill>
+                <a:latin typeface="Calibri"/>
+              </a:rPr>
+              <a:t>Setting up OOTB Service Maps for visual dependency display</a:t>
+            </a:r>
+          </a:p>
+          <a:p>
+            <a:r>
+              <a:rPr lang="en-US" dirty="0" sz="1100">
+                <a:solidFill>
+                  <a:srgbClr val="16A34A"/>
+                </a:solidFill>
+                <a:latin typeface="Calibri"/>
+              </a:rPr>
+              <a:t>✓  </a:t>
+            </a:r>
+            <a:r>
+              <a:rPr lang="en-US" dirty="0" sz="1100">
+                <a:solidFill>
+                  <a:srgbClr val="1A1A1A"/>
+                </a:solidFill>
+                <a:latin typeface="Calibri"/>
+              </a:rPr>
+              <a:t>Defining CSDM phasing approach (Foundation → Advanced in staged sprints)</a:t>
+            </a:r>
           </a:p>
         </p:txBody>
       </p:sp>
@@ -13391,6 +13471,10 @@
             <a:prstDash val="solid"/>
           </a:ln>
         </p:spPr>
+        <p:txBody>
+          <a:bodyPr/>
+          <a:p/>
+        </p:txBody>
       </p:sp>
       <p:sp>
         <p:nvSpPr>
@@ -13452,6 +13536,10 @@
             <a:prstDash val="solid"/>
           </a:ln>
         </p:spPr>
+        <p:txBody>
+          <a:bodyPr/>
+          <a:p/>
+        </p:txBody>
       </p:sp>
       <p:sp>
         <p:nvSpPr>
@@ -13474,106 +13562,204 @@
           <a:bodyPr wrap="square" rtlCol="0" anchor="t"/>
           <a:lstStyle/>
           <a:p>
-            <a:pPr indent="0" marL="0">
-              <a:buNone/>
-            </a:pPr>
-            <a:r>
-              <a:rPr lang="en-US" sz="1100" dirty="0">
-                <a:solidFill>
-                  <a:srgbClr val="334155"/>
-                </a:solidFill>
-                <a:latin typeface="Calibri" pitchFamily="34" charset="0"/>
-                <a:ea typeface="Calibri" pitchFamily="34" charset="-122"/>
-                <a:cs typeface="Calibri" pitchFamily="34" charset="-120"/>
-              </a:rPr>
-              <a:t>✗  Adding new fields to OOTB tables</a:t>
-            </a:r>
-            <a:endParaRPr lang="en-US" sz="1100" dirty="0"/>
-          </a:p>
-          <a:p>
-            <a:pPr indent="0" marL="0">
-              <a:buNone/>
-            </a:pPr>
-            <a:r>
-              <a:rPr lang="en-US" sz="1100" dirty="0">
-                <a:solidFill>
-                  <a:srgbClr val="334155"/>
-                </a:solidFill>
-                <a:latin typeface="Calibri" pitchFamily="34" charset="0"/>
-                <a:ea typeface="Calibri" pitchFamily="34" charset="-122"/>
-                <a:cs typeface="Calibri" pitchFamily="34" charset="-120"/>
-              </a:rPr>
-              <a:t>✗  Writing custom business rules or script actions</a:t>
-            </a:r>
-            <a:endParaRPr lang="en-US" sz="1100" dirty="0"/>
-          </a:p>
-          <a:p>
-            <a:pPr indent="0" marL="0">
-              <a:buNone/>
-            </a:pPr>
-            <a:r>
-              <a:rPr lang="en-US" sz="1100" dirty="0">
-                <a:solidFill>
-                  <a:srgbClr val="334155"/>
-                </a:solidFill>
-                <a:latin typeface="Calibri" pitchFamily="34" charset="0"/>
-                <a:ea typeface="Calibri" pitchFamily="34" charset="-122"/>
-                <a:cs typeface="Calibri" pitchFamily="34" charset="-120"/>
-              </a:rPr>
-              <a:t>✗  Creating non-standard CI classes or table extensions</a:t>
-            </a:r>
-            <a:endParaRPr lang="en-US" sz="1100" dirty="0"/>
-          </a:p>
-          <a:p>
-            <a:pPr indent="0" marL="0">
-              <a:buNone/>
-            </a:pPr>
-            <a:r>
-              <a:rPr lang="en-US" sz="1100" dirty="0">
-                <a:solidFill>
-                  <a:srgbClr val="334155"/>
-                </a:solidFill>
-                <a:latin typeface="Calibri" pitchFamily="34" charset="0"/>
-                <a:ea typeface="Calibri" pitchFamily="34" charset="-122"/>
-                <a:cs typeface="Calibri" pitchFamily="34" charset="-120"/>
-              </a:rPr>
-              <a:t>✗  Modifying OOTB workflow stages in code</a:t>
-            </a:r>
-            <a:endParaRPr lang="en-US" sz="1100" dirty="0"/>
-          </a:p>
-          <a:p>
-            <a:pPr indent="0" marL="0">
-              <a:buNone/>
-            </a:pPr>
-            <a:r>
-              <a:rPr lang="en-US" sz="1100" dirty="0">
-                <a:solidFill>
-                  <a:srgbClr val="334155"/>
-                </a:solidFill>
-                <a:latin typeface="Calibri" pitchFamily="34" charset="0"/>
-                <a:ea typeface="Calibri" pitchFamily="34" charset="-122"/>
-                <a:cs typeface="Calibri" pitchFamily="34" charset="-120"/>
-              </a:rPr>
-              <a:t>✗  Building custom client scripts or UI policies</a:t>
-            </a:r>
-            <a:endParaRPr lang="en-US" sz="1100" dirty="0"/>
-          </a:p>
-          <a:p>
-            <a:pPr indent="0" marL="0">
-              <a:buNone/>
-            </a:pPr>
-            <a:r>
-              <a:rPr lang="en-US" sz="1100" dirty="0">
-                <a:solidFill>
-                  <a:srgbClr val="334155"/>
-                </a:solidFill>
-                <a:latin typeface="Calibri" pitchFamily="34" charset="0"/>
-                <a:ea typeface="Calibri" pitchFamily="34" charset="-122"/>
-                <a:cs typeface="Calibri" pitchFamily="34" charset="-120"/>
-              </a:rPr>
-              <a:t>✗  Creating custom REST endpoints outside the catalog</a:t>
-            </a:r>
-            <a:endParaRPr lang="en-US" sz="1100" dirty="0"/>
+            <a:r>
+              <a:rPr lang="en-US" dirty="0" sz="1100">
+                <a:solidFill>
+                  <a:srgbClr val="B91C1C"/>
+                </a:solidFill>
+                <a:latin typeface="Calibri"/>
+              </a:rPr>
+              <a:t>✗  </a:t>
+            </a:r>
+            <a:r>
+              <a:rPr lang="en-US" dirty="0" sz="1100">
+                <a:solidFill>
+                  <a:srgbClr val="1A1A1A"/>
+                </a:solidFill>
+                <a:latin typeface="Calibri"/>
+              </a:rPr>
+              <a:t>Custom CSDM table extensions beyond OOTB service hierarchy tables</a:t>
+            </a:r>
+          </a:p>
+          <a:p>
+            <a:r>
+              <a:rPr lang="en-US" dirty="0" sz="1100">
+                <a:solidFill>
+                  <a:srgbClr val="B91C1C"/>
+                </a:solidFill>
+                <a:latin typeface="Calibri"/>
+              </a:rPr>
+              <a:t>✗  </a:t>
+            </a:r>
+            <a:r>
+              <a:rPr lang="en-US" dirty="0" sz="1100">
+                <a:solidFill>
+                  <a:srgbClr val="1A1A1A"/>
+                </a:solidFill>
+                <a:latin typeface="Calibri"/>
+              </a:rPr>
+              <a:t>Scripted service health calculations replacing OOTB service level targets</a:t>
+            </a:r>
+          </a:p>
+          <a:p>
+            <a:r>
+              <a:rPr lang="en-US" dirty="0" sz="1100">
+                <a:solidFill>
+                  <a:srgbClr val="B91C1C"/>
+                </a:solidFill>
+                <a:latin typeface="Calibri"/>
+              </a:rPr>
+              <a:t>✗  </a:t>
+            </a:r>
+            <a:r>
+              <a:rPr lang="en-US" dirty="0" sz="1100">
+                <a:solidFill>
+                  <a:srgbClr val="1A1A1A"/>
+                </a:solidFill>
+                <a:latin typeface="Calibri"/>
+              </a:rPr>
+              <a:t>External CMDB sync overriding OOTB service relationship model</a:t>
+            </a:r>
+          </a:p>
+          <a:p>
+            <a:r>
+              <a:rPr lang="en-US" dirty="0" sz="1100">
+                <a:solidFill>
+                  <a:srgbClr val="B91C1C"/>
+                </a:solidFill>
+                <a:latin typeface="Calibri"/>
+              </a:rPr>
+              <a:t>✗  </a:t>
+            </a:r>
+            <a:r>
+              <a:rPr lang="en-US" dirty="0" sz="1100">
+                <a:solidFill>
+                  <a:srgbClr val="1A1A1A"/>
+                </a:solidFill>
+                <a:latin typeface="Calibri"/>
+              </a:rPr>
+              <a:t>Custom service catalog integration with non-OOTB service record schema</a:t>
+            </a:r>
+          </a:p>
+          <a:p>
+            <a:r>
+              <a:rPr lang="en-US" dirty="0" sz="1100">
+                <a:solidFill>
+                  <a:srgbClr val="B91C1C"/>
+                </a:solidFill>
+                <a:latin typeface="Calibri"/>
+              </a:rPr>
+              <a:t>✗  </a:t>
+            </a:r>
+            <a:r>
+              <a:rPr lang="en-US" dirty="0" sz="1100">
+                <a:solidFill>
+                  <a:srgbClr val="1A1A1A"/>
+                </a:solidFill>
+                <a:latin typeface="Calibri"/>
+              </a:rPr>
+              <a:t>Scripted impact calculation logic for incidents and changes</a:t>
+            </a:r>
+          </a:p>
+          <a:p>
+            <a:r>
+              <a:rPr lang="en-US" dirty="0" sz="1100">
+                <a:solidFill>
+                  <a:srgbClr val="B91C1C"/>
+                </a:solidFill>
+                <a:latin typeface="Calibri"/>
+              </a:rPr>
+              <a:t>✗  </a:t>
+            </a:r>
+            <a:r>
+              <a:rPr lang="en-US" dirty="0" sz="1100">
+                <a:solidFill>
+                  <a:srgbClr val="1A1A1A"/>
+                </a:solidFill>
+                <a:latin typeface="Calibri"/>
+              </a:rPr>
+              <a:t>Custom service dashboard widgets beyond OOTB PA service KPIs</a:t>
+            </a:r>
+          </a:p>
+          <a:p>
+            <a:r>
+              <a:rPr lang="en-US" dirty="0" sz="1100">
+                <a:solidFill>
+                  <a:srgbClr val="B91C1C"/>
+                </a:solidFill>
+                <a:latin typeface="Calibri"/>
+              </a:rPr>
+              <a:t>✗  </a:t>
+            </a:r>
+            <a:r>
+              <a:rPr lang="en-US" dirty="0" sz="1100">
+                <a:solidFill>
+                  <a:srgbClr val="1A1A1A"/>
+                </a:solidFill>
+                <a:latin typeface="Calibri"/>
+              </a:rPr>
+              <a:t>Non-standard service hierarchy (more than 4 levels deep)</a:t>
+            </a:r>
+          </a:p>
+          <a:p>
+            <a:r>
+              <a:rPr lang="en-US" dirty="0" sz="1100">
+                <a:solidFill>
+                  <a:srgbClr val="B91C1C"/>
+                </a:solidFill>
+                <a:latin typeface="Calibri"/>
+              </a:rPr>
+              <a:t>✗  </a:t>
+            </a:r>
+            <a:r>
+              <a:rPr lang="en-US" dirty="0" sz="1100">
+                <a:solidFill>
+                  <a:srgbClr val="1A1A1A"/>
+                </a:solidFill>
+                <a:latin typeface="Calibri"/>
+              </a:rPr>
+              <a:t>Scripted service dependency population from external systems</a:t>
+            </a:r>
+          </a:p>
+          <a:p>
+            <a:r>
+              <a:rPr lang="en-US" dirty="0" sz="1100">
+                <a:solidFill>
+                  <a:srgbClr val="B91C1C"/>
+                </a:solidFill>
+                <a:latin typeface="Calibri"/>
+              </a:rPr>
+              <a:t>✗  </a:t>
+            </a:r>
+            <a:r>
+              <a:rPr lang="en-US" dirty="0" sz="1100">
+                <a:solidFill>
+                  <a:srgbClr val="1A1A1A"/>
+                </a:solidFill>
+                <a:latin typeface="Calibri"/>
+              </a:rPr>
+              <a:t>Custom service approval workflows for service record changes</a:t>
+            </a:r>
+          </a:p>
+          <a:p>
+            <a:r>
+              <a:rPr lang="en-US" dirty="0" sz="1100">
+                <a:solidFill>
+                  <a:srgbClr val="B91C1C"/>
+                </a:solidFill>
+                <a:latin typeface="Calibri"/>
+              </a:rPr>
+              <a:t>✗  </a:t>
+            </a:r>
+            <a:r>
+              <a:rPr lang="en-US" dirty="0" sz="1100">
+                <a:solidFill>
+                  <a:srgbClr val="1A1A1A"/>
+                </a:solidFill>
+                <a:latin typeface="Calibri"/>
+              </a:rPr>
+              <a:t>External service registry integration replacing OOTB CSDM records</a:t>
+            </a:r>
           </a:p>
         </p:txBody>
       </p:sp>
@@ -13601,6 +13787,10 @@
             <a:prstDash val="solid"/>
           </a:ln>
         </p:spPr>
+        <p:txBody>
+          <a:bodyPr/>
+          <a:p/>
+        </p:txBody>
       </p:sp>
       <p:sp>
         <p:nvSpPr>
